--- a/word-drafts/figures/Vision-Fig3-EndpointState.pptx
+++ b/word-drafts/figures/Vision-Fig3-EndpointState.pptx
@@ -7,7 +7,7 @@
   <p:sldIdLst>
     <p:sldId id="256" r:id="rId7"/>
   </p:sldIdLst>
-  <p:sldSz cx="2895600" cy="7315200" type="screen4x3"/>
+  <p:sldSz cx="3267075" cy="7315200" type="screen4x3"/>
   <p:notesSz cx="6858000" cy="9144000"/>
   <p:defaultTextStyle>
     <a:defPPr>
@@ -3491,7 +3491,7 @@
         <p:spPr>
           <a:xfrm>
             <a:off x="1381125" y="2314575"/>
-            <a:ext cx="1066800" cy="123825"/>
+            <a:ext cx="1323975" cy="123825"/>
           </a:xfrm>
           <a:prstGeom prst="rect">
             <a:avLst/>
@@ -3562,7 +3562,7 @@
         <p:spPr>
           <a:xfrm>
             <a:off x="1381125" y="3400425"/>
-            <a:ext cx="1343025" cy="123825"/>
+            <a:ext cx="1714500" cy="123825"/>
           </a:xfrm>
           <a:prstGeom prst="rect">
             <a:avLst/>
@@ -3633,7 +3633,7 @@
         <p:spPr>
           <a:xfrm>
             <a:off x="1381125" y="3543300"/>
-            <a:ext cx="1095375" cy="123825"/>
+            <a:ext cx="1362075" cy="123825"/>
           </a:xfrm>
           <a:prstGeom prst="rect">
             <a:avLst/>
@@ -3704,7 +3704,7 @@
         <p:spPr>
           <a:xfrm>
             <a:off x="1381125" y="4486275"/>
-            <a:ext cx="1143000" cy="123825"/>
+            <a:ext cx="1390650" cy="123825"/>
           </a:xfrm>
           <a:prstGeom prst="rect">
             <a:avLst/>
@@ -3775,7 +3775,7 @@
         <p:spPr>
           <a:xfrm>
             <a:off x="1381125" y="4629150"/>
-            <a:ext cx="419100" cy="123825"/>
+            <a:ext cx="523875" cy="123825"/>
           </a:xfrm>
           <a:prstGeom prst="rect">
             <a:avLst/>
@@ -3846,7 +3846,7 @@
         <p:spPr>
           <a:xfrm>
             <a:off x="1381125" y="2457450"/>
-            <a:ext cx="971550" cy="123825"/>
+            <a:ext cx="1190625" cy="123825"/>
           </a:xfrm>
           <a:prstGeom prst="rect">
             <a:avLst/>
@@ -3917,7 +3917,7 @@
         <p:spPr>
           <a:xfrm>
             <a:off x="1381125" y="5486400"/>
-            <a:ext cx="295275" cy="123825"/>
+            <a:ext cx="371475" cy="123825"/>
           </a:xfrm>
           <a:prstGeom prst="rect">
             <a:avLst/>
@@ -3988,7 +3988,7 @@
         <p:spPr>
           <a:xfrm>
             <a:off x="1381125" y="5743575"/>
-            <a:ext cx="295275" cy="123825"/>
+            <a:ext cx="371475" cy="123825"/>
           </a:xfrm>
           <a:prstGeom prst="rect">
             <a:avLst/>
@@ -4059,7 +4059,7 @@
         <p:spPr>
           <a:xfrm>
             <a:off x="1381125" y="6572250"/>
-            <a:ext cx="295275" cy="123825"/>
+            <a:ext cx="371475" cy="123825"/>
           </a:xfrm>
           <a:prstGeom prst="rect">
             <a:avLst/>
@@ -4130,7 +4130,7 @@
         <p:spPr>
           <a:xfrm>
             <a:off x="1381125" y="6772275"/>
-            <a:ext cx="504825" cy="123825"/>
+            <a:ext cx="628650" cy="123825"/>
           </a:xfrm>
           <a:prstGeom prst="rect">
             <a:avLst/>
@@ -4201,7 +4201,7 @@
         <p:spPr>
           <a:xfrm>
             <a:off x="1381125" y="6943725"/>
-            <a:ext cx="828675" cy="123825"/>
+            <a:ext cx="1057275" cy="123825"/>
           </a:xfrm>
           <a:prstGeom prst="rect">
             <a:avLst/>
